--- a/7ass/main7.pptx
+++ b/7ass/main7.pptx
@@ -3651,9 +3651,18 @@
   <p:clrMapOvr>
     <a:overrideClrMapping bg1="dk1" tx1="lt1" bg2="dk2" tx2="lt2" accent1="accent1" accent2="accent2" accent3="accent3" accent4="accent4" accent5="accent5" accent6="accent6" hlink="hlink" folHlink="folHlink"/>
   </p:clrMapOvr>
-  <p:transition spd="med">
-    <p:pull/>
-  </p:transition>
+  <mc:AlternateContent xmlns:mc="http://schemas.openxmlformats.org/markup-compatibility/2006">
+    <mc:Choice xmlns:p159="http://schemas.microsoft.com/office/powerpoint/2015/09/main" Requires="p159">
+      <p:transition xmlns:p14="http://schemas.microsoft.com/office/powerpoint/2010/main" spd="slow" p14:dur="2000">
+        <p159:morph option="byObject"/>
+      </p:transition>
+    </mc:Choice>
+    <mc:Fallback>
+      <p:transition spd="slow">
+        <p:fade/>
+      </p:transition>
+    </mc:Fallback>
+  </mc:AlternateContent>
 </p:sld>
 </file>
 
@@ -3813,6 +3822,18 @@
   <p:clrMapOvr>
     <a:masterClrMapping/>
   </p:clrMapOvr>
+  <mc:AlternateContent xmlns:mc="http://schemas.openxmlformats.org/markup-compatibility/2006">
+    <mc:Choice xmlns:p159="http://schemas.microsoft.com/office/powerpoint/2015/09/main" Requires="p159">
+      <p:transition xmlns:p14="http://schemas.microsoft.com/office/powerpoint/2010/main" spd="slow" p14:dur="2000">
+        <p159:morph option="byObject"/>
+      </p:transition>
+    </mc:Choice>
+    <mc:Fallback>
+      <p:transition spd="slow">
+        <p:fade/>
+      </p:transition>
+    </mc:Fallback>
+  </mc:AlternateContent>
 </p:sld>
 </file>
 
@@ -3992,6 +4013,18 @@
   <p:clrMapOvr>
     <a:masterClrMapping/>
   </p:clrMapOvr>
+  <mc:AlternateContent xmlns:mc="http://schemas.openxmlformats.org/markup-compatibility/2006">
+    <mc:Choice xmlns:p159="http://schemas.microsoft.com/office/powerpoint/2015/09/main" Requires="p159">
+      <p:transition xmlns:p14="http://schemas.microsoft.com/office/powerpoint/2010/main" spd="slow" p14:dur="2000">
+        <p159:morph option="byObject"/>
+      </p:transition>
+    </mc:Choice>
+    <mc:Fallback>
+      <p:transition spd="slow">
+        <p:fade/>
+      </p:transition>
+    </mc:Fallback>
+  </mc:AlternateContent>
 </p:sld>
 </file>
 
@@ -4385,6 +4418,18 @@
   <p:clrMapOvr>
     <a:overrideClrMapping bg1="dk1" tx1="lt1" bg2="dk2" tx2="lt2" accent1="accent1" accent2="accent2" accent3="accent3" accent4="accent4" accent5="accent5" accent6="accent6" hlink="hlink" folHlink="folHlink"/>
   </p:clrMapOvr>
+  <mc:AlternateContent xmlns:mc="http://schemas.openxmlformats.org/markup-compatibility/2006">
+    <mc:Choice xmlns:p159="http://schemas.microsoft.com/office/powerpoint/2015/09/main" Requires="p159">
+      <p:transition xmlns:p14="http://schemas.microsoft.com/office/powerpoint/2010/main" spd="slow" p14:dur="2000">
+        <p159:morph option="byObject"/>
+      </p:transition>
+    </mc:Choice>
+    <mc:Fallback>
+      <p:transition spd="slow">
+        <p:fade/>
+      </p:transition>
+    </mc:Fallback>
+  </mc:AlternateContent>
 </p:sld>
 </file>
 
@@ -4680,6 +4725,18 @@
   <p:clrMapOvr>
     <a:masterClrMapping/>
   </p:clrMapOvr>
+  <mc:AlternateContent xmlns:mc="http://schemas.openxmlformats.org/markup-compatibility/2006">
+    <mc:Choice xmlns:p159="http://schemas.microsoft.com/office/powerpoint/2015/09/main" Requires="p159">
+      <p:transition xmlns:p14="http://schemas.microsoft.com/office/powerpoint/2010/main" spd="slow" p14:dur="2000">
+        <p159:morph option="byObject"/>
+      </p:transition>
+    </mc:Choice>
+    <mc:Fallback>
+      <p:transition spd="slow">
+        <p:fade/>
+      </p:transition>
+    </mc:Fallback>
+  </mc:AlternateContent>
 </p:sld>
 </file>
 
@@ -6752,6 +6809,18 @@
   <p:clrMapOvr>
     <a:masterClrMapping/>
   </p:clrMapOvr>
+  <mc:AlternateContent xmlns:mc="http://schemas.openxmlformats.org/markup-compatibility/2006">
+    <mc:Choice xmlns:p159="http://schemas.microsoft.com/office/powerpoint/2015/09/main" Requires="p159">
+      <p:transition xmlns:p14="http://schemas.microsoft.com/office/powerpoint/2010/main" spd="slow" p14:dur="2000">
+        <p159:morph option="byObject"/>
+      </p:transition>
+    </mc:Choice>
+    <mc:Fallback>
+      <p:transition spd="slow">
+        <p:fade/>
+      </p:transition>
+    </mc:Fallback>
+  </mc:AlternateContent>
 </p:sld>
 </file>
 
@@ -6832,6 +6901,18 @@
   <p:clrMapOvr>
     <a:masterClrMapping/>
   </p:clrMapOvr>
+  <mc:AlternateContent xmlns:mc="http://schemas.openxmlformats.org/markup-compatibility/2006">
+    <mc:Choice xmlns:p159="http://schemas.microsoft.com/office/powerpoint/2015/09/main" Requires="p159">
+      <p:transition xmlns:p14="http://schemas.microsoft.com/office/powerpoint/2010/main" spd="slow" p14:dur="2000">
+        <p159:morph option="byObject"/>
+      </p:transition>
+    </mc:Choice>
+    <mc:Fallback>
+      <p:transition spd="slow">
+        <p:fade/>
+      </p:transition>
+    </mc:Fallback>
+  </mc:AlternateContent>
 </p:sld>
 </file>
 
@@ -6997,6 +7078,18 @@
   <p:clrMapOvr>
     <a:masterClrMapping/>
   </p:clrMapOvr>
+  <mc:AlternateContent xmlns:mc="http://schemas.openxmlformats.org/markup-compatibility/2006">
+    <mc:Choice xmlns:p159="http://schemas.microsoft.com/office/powerpoint/2015/09/main" Requires="p159">
+      <p:transition xmlns:p14="http://schemas.microsoft.com/office/powerpoint/2010/main" spd="slow" p14:dur="2000">
+        <p159:morph option="byObject"/>
+      </p:transition>
+    </mc:Choice>
+    <mc:Fallback>
+      <p:transition spd="slow">
+        <p:fade/>
+      </p:transition>
+    </mc:Fallback>
+  </mc:AlternateContent>
 </p:sld>
 </file>
 
@@ -7142,6 +7235,18 @@
   <p:clrMapOvr>
     <a:masterClrMapping/>
   </p:clrMapOvr>
+  <mc:AlternateContent xmlns:mc="http://schemas.openxmlformats.org/markup-compatibility/2006">
+    <mc:Choice xmlns:p159="http://schemas.microsoft.com/office/powerpoint/2015/09/main" Requires="p159">
+      <p:transition xmlns:p14="http://schemas.microsoft.com/office/powerpoint/2010/main" spd="slow" p14:dur="2000">
+        <p159:morph option="byObject"/>
+      </p:transition>
+    </mc:Choice>
+    <mc:Fallback>
+      <p:transition spd="slow">
+        <p:fade/>
+      </p:transition>
+    </mc:Fallback>
+  </mc:AlternateContent>
 </p:sld>
 </file>
 
@@ -7322,6 +7427,18 @@
   <p:clrMapOvr>
     <a:masterClrMapping/>
   </p:clrMapOvr>
+  <mc:AlternateContent xmlns:mc="http://schemas.openxmlformats.org/markup-compatibility/2006">
+    <mc:Choice xmlns:p159="http://schemas.microsoft.com/office/powerpoint/2015/09/main" Requires="p159">
+      <p:transition xmlns:p14="http://schemas.microsoft.com/office/powerpoint/2010/main" spd="slow" p14:dur="2000">
+        <p159:morph option="byObject"/>
+      </p:transition>
+    </mc:Choice>
+    <mc:Fallback>
+      <p:transition spd="slow">
+        <p:fade/>
+      </p:transition>
+    </mc:Fallback>
+  </mc:AlternateContent>
 </p:sld>
 </file>
 
@@ -7845,6 +7962,18 @@
   <p:clrMapOvr>
     <a:masterClrMapping/>
   </p:clrMapOvr>
+  <mc:AlternateContent xmlns:mc="http://schemas.openxmlformats.org/markup-compatibility/2006">
+    <mc:Choice xmlns:p159="http://schemas.microsoft.com/office/powerpoint/2015/09/main" Requires="p159">
+      <p:transition xmlns:p14="http://schemas.microsoft.com/office/powerpoint/2010/main" spd="slow" p14:dur="2000">
+        <p159:morph option="byObject"/>
+      </p:transition>
+    </mc:Choice>
+    <mc:Fallback>
+      <p:transition spd="slow">
+        <p:fade/>
+      </p:transition>
+    </mc:Fallback>
+  </mc:AlternateContent>
 </p:sld>
 </file>
 
@@ -8174,9 +8303,18 @@
   <p:clrMapOvr>
     <a:overrideClrMapping bg1="dk1" tx1="lt1" bg2="dk2" tx2="lt2" accent1="accent1" accent2="accent2" accent3="accent3" accent4="accent4" accent5="accent5" accent6="accent6" hlink="hlink" folHlink="folHlink"/>
   </p:clrMapOvr>
-  <p:transition spd="med">
-    <p:pull/>
-  </p:transition>
+  <mc:AlternateContent xmlns:mc="http://schemas.openxmlformats.org/markup-compatibility/2006">
+    <mc:Choice xmlns:p159="http://schemas.microsoft.com/office/powerpoint/2015/09/main" Requires="p159">
+      <p:transition xmlns:p14="http://schemas.microsoft.com/office/powerpoint/2010/main" spd="slow" p14:dur="2000">
+        <p159:morph option="byObject"/>
+      </p:transition>
+    </mc:Choice>
+    <mc:Fallback>
+      <p:transition spd="slow">
+        <p:fade/>
+      </p:transition>
+    </mc:Fallback>
+  </mc:AlternateContent>
 </p:sld>
 </file>
 
@@ -8668,6 +8806,18 @@
   <p:clrMapOvr>
     <a:masterClrMapping/>
   </p:clrMapOvr>
+  <mc:AlternateContent xmlns:mc="http://schemas.openxmlformats.org/markup-compatibility/2006">
+    <mc:Choice xmlns:p159="http://schemas.microsoft.com/office/powerpoint/2015/09/main" Requires="p159">
+      <p:transition xmlns:p14="http://schemas.microsoft.com/office/powerpoint/2010/main" spd="slow" p14:dur="2000">
+        <p159:morph option="byObject"/>
+      </p:transition>
+    </mc:Choice>
+    <mc:Fallback>
+      <p:transition spd="slow">
+        <p:fade/>
+      </p:transition>
+    </mc:Fallback>
+  </mc:AlternateContent>
 </p:sld>
 </file>
 
@@ -8748,6 +8898,18 @@
   <p:clrMapOvr>
     <a:masterClrMapping/>
   </p:clrMapOvr>
+  <mc:AlternateContent xmlns:mc="http://schemas.openxmlformats.org/markup-compatibility/2006">
+    <mc:Choice xmlns:p159="http://schemas.microsoft.com/office/powerpoint/2015/09/main" Requires="p159">
+      <p:transition xmlns:p14="http://schemas.microsoft.com/office/powerpoint/2010/main" spd="slow" p14:dur="2000">
+        <p159:morph option="byObject"/>
+      </p:transition>
+    </mc:Choice>
+    <mc:Fallback>
+      <p:transition spd="slow">
+        <p:fade/>
+      </p:transition>
+    </mc:Fallback>
+  </mc:AlternateContent>
 </p:sld>
 </file>
 
@@ -12156,9 +12318,18 @@
   <p:clrMapOvr>
     <a:masterClrMapping/>
   </p:clrMapOvr>
-  <p:transition spd="med">
-    <p:pull/>
-  </p:transition>
+  <mc:AlternateContent xmlns:mc="http://schemas.openxmlformats.org/markup-compatibility/2006">
+    <mc:Choice xmlns:p159="http://schemas.microsoft.com/office/powerpoint/2015/09/main" Requires="p159">
+      <p:transition xmlns:p14="http://schemas.microsoft.com/office/powerpoint/2010/main" spd="slow" p14:dur="2000">
+        <p159:morph option="byObject"/>
+      </p:transition>
+    </mc:Choice>
+    <mc:Fallback>
+      <p:transition spd="slow">
+        <p:fade/>
+      </p:transition>
+    </mc:Fallback>
+  </mc:AlternateContent>
 </p:sld>
 </file>
 
@@ -13346,9 +13517,18 @@
   <p:clrMapOvr>
     <a:masterClrMapping/>
   </p:clrMapOvr>
-  <p:transition spd="med">
-    <p:pull/>
-  </p:transition>
+  <mc:AlternateContent xmlns:mc="http://schemas.openxmlformats.org/markup-compatibility/2006">
+    <mc:Choice xmlns:p159="http://schemas.microsoft.com/office/powerpoint/2015/09/main" Requires="p159">
+      <p:transition xmlns:p14="http://schemas.microsoft.com/office/powerpoint/2010/main" spd="slow" p14:dur="2000">
+        <p159:morph option="byObject"/>
+      </p:transition>
+    </mc:Choice>
+    <mc:Fallback>
+      <p:transition spd="slow">
+        <p:fade/>
+      </p:transition>
+    </mc:Fallback>
+  </mc:AlternateContent>
 </p:sld>
 </file>
 
@@ -13543,9 +13723,18 @@
   <p:clrMapOvr>
     <a:masterClrMapping/>
   </p:clrMapOvr>
-  <p:transition spd="med">
-    <p:pull/>
-  </p:transition>
+  <mc:AlternateContent xmlns:mc="http://schemas.openxmlformats.org/markup-compatibility/2006">
+    <mc:Choice xmlns:p159="http://schemas.microsoft.com/office/powerpoint/2015/09/main" Requires="p159">
+      <p:transition xmlns:p14="http://schemas.microsoft.com/office/powerpoint/2010/main" spd="slow" p14:dur="2000">
+        <p159:morph option="byObject"/>
+      </p:transition>
+    </mc:Choice>
+    <mc:Fallback>
+      <p:transition spd="slow">
+        <p:fade/>
+      </p:transition>
+    </mc:Fallback>
+  </mc:AlternateContent>
 </p:sld>
 </file>
 
@@ -13792,9 +13981,18 @@
   <p:clrMapOvr>
     <a:masterClrMapping/>
   </p:clrMapOvr>
-  <p:transition spd="med">
-    <p:pull/>
-  </p:transition>
+  <mc:AlternateContent xmlns:mc="http://schemas.openxmlformats.org/markup-compatibility/2006">
+    <mc:Choice xmlns:p159="http://schemas.microsoft.com/office/powerpoint/2015/09/main" Requires="p159">
+      <p:transition xmlns:p14="http://schemas.microsoft.com/office/powerpoint/2010/main" spd="slow" p14:dur="2000">
+        <p159:morph option="byObject"/>
+      </p:transition>
+    </mc:Choice>
+    <mc:Fallback>
+      <p:transition spd="slow">
+        <p:fade/>
+      </p:transition>
+    </mc:Fallback>
+  </mc:AlternateContent>
 </p:sld>
 </file>
 
@@ -15192,9 +15390,18 @@
   <p:clrMapOvr>
     <a:masterClrMapping/>
   </p:clrMapOvr>
-  <p:transition spd="med">
-    <p:pull/>
-  </p:transition>
+  <mc:AlternateContent xmlns:mc="http://schemas.openxmlformats.org/markup-compatibility/2006">
+    <mc:Choice xmlns:p159="http://schemas.microsoft.com/office/powerpoint/2015/09/main" Requires="p159">
+      <p:transition xmlns:p14="http://schemas.microsoft.com/office/powerpoint/2010/main" spd="slow" p14:dur="2000">
+        <p159:morph option="byObject"/>
+      </p:transition>
+    </mc:Choice>
+    <mc:Fallback>
+      <p:transition spd="slow">
+        <p:fade/>
+      </p:transition>
+    </mc:Fallback>
+  </mc:AlternateContent>
 </p:sld>
 </file>
 
@@ -15326,9 +15533,18 @@
   <p:clrMapOvr>
     <a:masterClrMapping/>
   </p:clrMapOvr>
-  <p:transition spd="med">
-    <p:pull/>
-  </p:transition>
+  <mc:AlternateContent xmlns:mc="http://schemas.openxmlformats.org/markup-compatibility/2006">
+    <mc:Choice xmlns:p159="http://schemas.microsoft.com/office/powerpoint/2015/09/main" Requires="p159">
+      <p:transition xmlns:p14="http://schemas.microsoft.com/office/powerpoint/2010/main" spd="slow" p14:dur="2000">
+        <p159:morph option="byObject"/>
+      </p:transition>
+    </mc:Choice>
+    <mc:Fallback>
+      <p:transition spd="slow">
+        <p:fade/>
+      </p:transition>
+    </mc:Fallback>
+  </mc:AlternateContent>
 </p:sld>
 </file>
 
@@ -17661,9 +17877,18 @@
   <p:clrMapOvr>
     <a:masterClrMapping/>
   </p:clrMapOvr>
-  <p:transition spd="med">
-    <p:pull/>
-  </p:transition>
+  <mc:AlternateContent xmlns:mc="http://schemas.openxmlformats.org/markup-compatibility/2006">
+    <mc:Choice xmlns:p159="http://schemas.microsoft.com/office/powerpoint/2015/09/main" Requires="p159">
+      <p:transition xmlns:p14="http://schemas.microsoft.com/office/powerpoint/2010/main" spd="slow" p14:dur="2000">
+        <p159:morph option="byObject"/>
+      </p:transition>
+    </mc:Choice>
+    <mc:Fallback>
+      <p:transition spd="slow">
+        <p:fade/>
+      </p:transition>
+    </mc:Fallback>
+  </mc:AlternateContent>
 </p:sld>
 </file>
 
@@ -18204,9 +18429,18 @@
   <p:clrMapOvr>
     <a:masterClrMapping/>
   </p:clrMapOvr>
-  <p:transition spd="med">
-    <p:pull/>
-  </p:transition>
+  <mc:AlternateContent xmlns:mc="http://schemas.openxmlformats.org/markup-compatibility/2006">
+    <mc:Choice xmlns:p159="http://schemas.microsoft.com/office/powerpoint/2015/09/main" Requires="p159">
+      <p:transition xmlns:p14="http://schemas.microsoft.com/office/powerpoint/2010/main" spd="slow" p14:dur="2000">
+        <p159:morph option="byObject"/>
+      </p:transition>
+    </mc:Choice>
+    <mc:Fallback>
+      <p:transition spd="slow">
+        <p:fade/>
+      </p:transition>
+    </mc:Fallback>
+  </mc:AlternateContent>
 </p:sld>
 </file>
 
@@ -19076,9 +19310,18 @@
   <p:clrMapOvr>
     <a:masterClrMapping/>
   </p:clrMapOvr>
-  <p:transition spd="med">
-    <p:pull/>
-  </p:transition>
+  <mc:AlternateContent xmlns:mc="http://schemas.openxmlformats.org/markup-compatibility/2006">
+    <mc:Choice xmlns:p159="http://schemas.microsoft.com/office/powerpoint/2015/09/main" Requires="p159">
+      <p:transition xmlns:p14="http://schemas.microsoft.com/office/powerpoint/2010/main" spd="slow" p14:dur="2000">
+        <p159:morph option="byObject"/>
+      </p:transition>
+    </mc:Choice>
+    <mc:Fallback>
+      <p:transition spd="slow">
+        <p:fade/>
+      </p:transition>
+    </mc:Fallback>
+  </mc:AlternateContent>
 </p:sld>
 </file>
 
@@ -20405,9 +20648,18 @@
   <p:clrMapOvr>
     <a:masterClrMapping/>
   </p:clrMapOvr>
-  <p:transition spd="med">
-    <p:pull/>
-  </p:transition>
+  <mc:AlternateContent xmlns:mc="http://schemas.openxmlformats.org/markup-compatibility/2006">
+    <mc:Choice xmlns:p159="http://schemas.microsoft.com/office/powerpoint/2015/09/main" Requires="p159">
+      <p:transition xmlns:p14="http://schemas.microsoft.com/office/powerpoint/2010/main" spd="slow" p14:dur="2000">
+        <p159:morph option="byObject"/>
+      </p:transition>
+    </mc:Choice>
+    <mc:Fallback>
+      <p:transition spd="slow">
+        <p:fade/>
+      </p:transition>
+    </mc:Fallback>
+  </mc:AlternateContent>
 </p:sld>
 </file>
 
@@ -20687,9 +20939,18 @@
   <p:clrMapOvr>
     <a:masterClrMapping/>
   </p:clrMapOvr>
-  <p:transition spd="med">
-    <p:pull/>
-  </p:transition>
+  <mc:AlternateContent xmlns:mc="http://schemas.openxmlformats.org/markup-compatibility/2006">
+    <mc:Choice xmlns:p159="http://schemas.microsoft.com/office/powerpoint/2015/09/main" Requires="p159">
+      <p:transition xmlns:p14="http://schemas.microsoft.com/office/powerpoint/2010/main" spd="slow" p14:dur="2000">
+        <p159:morph option="byObject"/>
+      </p:transition>
+    </mc:Choice>
+    <mc:Fallback>
+      <p:transition spd="slow">
+        <p:fade/>
+      </p:transition>
+    </mc:Fallback>
+  </mc:AlternateContent>
 </p:sld>
 </file>
 
@@ -20823,9 +21084,18 @@
   <p:clrMapOvr>
     <a:masterClrMapping/>
   </p:clrMapOvr>
-  <p:transition spd="med">
-    <p:pull/>
-  </p:transition>
+  <mc:AlternateContent xmlns:mc="http://schemas.openxmlformats.org/markup-compatibility/2006">
+    <mc:Choice xmlns:p159="http://schemas.microsoft.com/office/powerpoint/2015/09/main" Requires="p159">
+      <p:transition xmlns:p14="http://schemas.microsoft.com/office/powerpoint/2010/main" spd="slow" p14:dur="2000">
+        <p159:morph option="byObject"/>
+      </p:transition>
+    </mc:Choice>
+    <mc:Fallback>
+      <p:transition spd="slow">
+        <p:fade/>
+      </p:transition>
+    </mc:Fallback>
+  </mc:AlternateContent>
 </p:sld>
 </file>
 
@@ -20933,9 +21203,18 @@
   <p:clrMapOvr>
     <a:masterClrMapping/>
   </p:clrMapOvr>
-  <p:transition spd="med">
-    <p:pull/>
-  </p:transition>
+  <mc:AlternateContent xmlns:mc="http://schemas.openxmlformats.org/markup-compatibility/2006">
+    <mc:Choice xmlns:p159="http://schemas.microsoft.com/office/powerpoint/2015/09/main" Requires="p159">
+      <p:transition xmlns:p14="http://schemas.microsoft.com/office/powerpoint/2010/main" spd="slow" p14:dur="2000">
+        <p159:morph option="byObject"/>
+      </p:transition>
+    </mc:Choice>
+    <mc:Fallback>
+      <p:transition spd="slow">
+        <p:fade/>
+      </p:transition>
+    </mc:Fallback>
+  </mc:AlternateContent>
 </p:sld>
 </file>
 
@@ -21071,9 +21350,18 @@
   <p:clrMapOvr>
     <a:masterClrMapping/>
   </p:clrMapOvr>
-  <p:transition spd="med">
-    <p:pull/>
-  </p:transition>
+  <mc:AlternateContent xmlns:mc="http://schemas.openxmlformats.org/markup-compatibility/2006">
+    <mc:Choice xmlns:p159="http://schemas.microsoft.com/office/powerpoint/2015/09/main" Requires="p159">
+      <p:transition xmlns:p14="http://schemas.microsoft.com/office/powerpoint/2010/main" spd="slow" p14:dur="2000">
+        <p159:morph option="byObject"/>
+      </p:transition>
+    </mc:Choice>
+    <mc:Fallback>
+      <p:transition spd="slow">
+        <p:fade/>
+      </p:transition>
+    </mc:Fallback>
+  </mc:AlternateContent>
 </p:sld>
 </file>
 
@@ -21207,6 +21495,18 @@
   <p:clrMapOvr>
     <a:masterClrMapping/>
   </p:clrMapOvr>
+  <mc:AlternateContent xmlns:mc="http://schemas.openxmlformats.org/markup-compatibility/2006">
+    <mc:Choice xmlns:p159="http://schemas.microsoft.com/office/powerpoint/2015/09/main" Requires="p159">
+      <p:transition xmlns:p14="http://schemas.microsoft.com/office/powerpoint/2010/main" spd="slow" p14:dur="2000">
+        <p159:morph option="byObject"/>
+      </p:transition>
+    </mc:Choice>
+    <mc:Fallback>
+      <p:transition spd="slow">
+        <p:fade/>
+      </p:transition>
+    </mc:Fallback>
+  </mc:AlternateContent>
 </p:sld>
 </file>
 
@@ -21387,6 +21687,18 @@
   <p:clrMapOvr>
     <a:masterClrMapping/>
   </p:clrMapOvr>
+  <mc:AlternateContent xmlns:mc="http://schemas.openxmlformats.org/markup-compatibility/2006">
+    <mc:Choice xmlns:p159="http://schemas.microsoft.com/office/powerpoint/2015/09/main" Requires="p159">
+      <p:transition xmlns:p14="http://schemas.microsoft.com/office/powerpoint/2010/main" spd="slow" p14:dur="2000">
+        <p159:morph option="byObject"/>
+      </p:transition>
+    </mc:Choice>
+    <mc:Fallback>
+      <p:transition spd="slow">
+        <p:fade/>
+      </p:transition>
+    </mc:Fallback>
+  </mc:AlternateContent>
 </p:sld>
 </file>
 
@@ -21467,6 +21779,18 @@
   <p:clrMapOvr>
     <a:masterClrMapping/>
   </p:clrMapOvr>
+  <mc:AlternateContent xmlns:mc="http://schemas.openxmlformats.org/markup-compatibility/2006">
+    <mc:Choice xmlns:p159="http://schemas.microsoft.com/office/powerpoint/2015/09/main" Requires="p159">
+      <p:transition xmlns:p14="http://schemas.microsoft.com/office/powerpoint/2010/main" spd="slow" p14:dur="2000">
+        <p159:morph option="byObject"/>
+      </p:transition>
+    </mc:Choice>
+    <mc:Fallback>
+      <p:transition spd="slow">
+        <p:fade/>
+      </p:transition>
+    </mc:Fallback>
+  </mc:AlternateContent>
 </p:sld>
 </file>
 
@@ -21678,6 +22002,18 @@
   <p:clrMapOvr>
     <a:masterClrMapping/>
   </p:clrMapOvr>
+  <mc:AlternateContent xmlns:mc="http://schemas.openxmlformats.org/markup-compatibility/2006">
+    <mc:Choice xmlns:p159="http://schemas.microsoft.com/office/powerpoint/2015/09/main" Requires="p159">
+      <p:transition xmlns:p14="http://schemas.microsoft.com/office/powerpoint/2010/main" spd="slow" p14:dur="2000">
+        <p159:morph option="byObject"/>
+      </p:transition>
+    </mc:Choice>
+    <mc:Fallback>
+      <p:transition spd="slow">
+        <p:fade/>
+      </p:transition>
+    </mc:Fallback>
+  </mc:AlternateContent>
 </p:sld>
 </file>
 
@@ -21928,6 +22264,18 @@
   <p:clrMapOvr>
     <a:masterClrMapping/>
   </p:clrMapOvr>
+  <mc:AlternateContent xmlns:mc="http://schemas.openxmlformats.org/markup-compatibility/2006">
+    <mc:Choice xmlns:p159="http://schemas.microsoft.com/office/powerpoint/2015/09/main" Requires="p159">
+      <p:transition xmlns:p14="http://schemas.microsoft.com/office/powerpoint/2010/main" spd="slow" p14:dur="2000">
+        <p159:morph option="byObject"/>
+      </p:transition>
+    </mc:Choice>
+    <mc:Fallback>
+      <p:transition spd="slow">
+        <p:fade/>
+      </p:transition>
+    </mc:Fallback>
+  </mc:AlternateContent>
 </p:sld>
 </file>
 
@@ -22071,6 +22419,18 @@
   <p:clrMapOvr>
     <a:masterClrMapping/>
   </p:clrMapOvr>
+  <mc:AlternateContent xmlns:mc="http://schemas.openxmlformats.org/markup-compatibility/2006">
+    <mc:Choice xmlns:p159="http://schemas.microsoft.com/office/powerpoint/2015/09/main" Requires="p159">
+      <p:transition xmlns:p14="http://schemas.microsoft.com/office/powerpoint/2010/main" spd="slow" p14:dur="2000">
+        <p159:morph option="byObject"/>
+      </p:transition>
+    </mc:Choice>
+    <mc:Fallback>
+      <p:transition spd="slow">
+        <p:fade/>
+      </p:transition>
+    </mc:Fallback>
+  </mc:AlternateContent>
 </p:sld>
 </file>
 
@@ -22596,6 +22956,18 @@
   <p:clrMapOvr>
     <a:masterClrMapping/>
   </p:clrMapOvr>
+  <mc:AlternateContent xmlns:mc="http://schemas.openxmlformats.org/markup-compatibility/2006">
+    <mc:Choice xmlns:p159="http://schemas.microsoft.com/office/powerpoint/2015/09/main" Requires="p159">
+      <p:transition xmlns:p14="http://schemas.microsoft.com/office/powerpoint/2010/main" spd="slow" p14:dur="2000">
+        <p159:morph option="byObject"/>
+      </p:transition>
+    </mc:Choice>
+    <mc:Fallback>
+      <p:transition spd="slow">
+        <p:fade/>
+      </p:transition>
+    </mc:Fallback>
+  </mc:AlternateContent>
 </p:sld>
 </file>
 
@@ -22802,6 +23174,18 @@
   <p:clrMapOvr>
     <a:masterClrMapping/>
   </p:clrMapOvr>
+  <mc:AlternateContent xmlns:mc="http://schemas.openxmlformats.org/markup-compatibility/2006">
+    <mc:Choice xmlns:p159="http://schemas.microsoft.com/office/powerpoint/2015/09/main" Requires="p159">
+      <p:transition xmlns:p14="http://schemas.microsoft.com/office/powerpoint/2010/main" spd="slow" p14:dur="2000">
+        <p159:morph option="byObject"/>
+      </p:transition>
+    </mc:Choice>
+    <mc:Fallback>
+      <p:transition spd="slow">
+        <p:fade/>
+      </p:transition>
+    </mc:Fallback>
+  </mc:AlternateContent>
 </p:sld>
 </file>
 
@@ -22905,6 +23289,18 @@
   <p:clrMapOvr>
     <a:masterClrMapping/>
   </p:clrMapOvr>
+  <mc:AlternateContent xmlns:mc="http://schemas.openxmlformats.org/markup-compatibility/2006">
+    <mc:Choice xmlns:p159="http://schemas.microsoft.com/office/powerpoint/2015/09/main" Requires="p159">
+      <p:transition xmlns:p14="http://schemas.microsoft.com/office/powerpoint/2010/main" spd="slow" p14:dur="2000">
+        <p159:morph option="byObject"/>
+      </p:transition>
+    </mc:Choice>
+    <mc:Fallback>
+      <p:transition spd="slow">
+        <p:fade/>
+      </p:transition>
+    </mc:Fallback>
+  </mc:AlternateContent>
 </p:sld>
 </file>
 

--- a/7ass/main7.pptx
+++ b/7ass/main7.pptx
@@ -303,7 +303,7 @@
           <a:p>
             <a:fld id="{E0C858BD-AA26-3249-9D78-E68179219554}" type="datetimeFigureOut">
               <a:rPr lang="en-IL" smtClean="0"/>
-              <a:t>06/02/2023</a:t>
+              <a:t>08/02/2023</a:t>
             </a:fld>
             <a:endParaRPr lang="en-IL"/>
           </a:p>
@@ -503,7 +503,7 @@
           <a:p>
             <a:fld id="{E0C858BD-AA26-3249-9D78-E68179219554}" type="datetimeFigureOut">
               <a:rPr lang="en-IL" smtClean="0"/>
-              <a:t>06/02/2023</a:t>
+              <a:t>08/02/2023</a:t>
             </a:fld>
             <a:endParaRPr lang="en-IL"/>
           </a:p>
@@ -713,7 +713,7 @@
           <a:p>
             <a:fld id="{E0C858BD-AA26-3249-9D78-E68179219554}" type="datetimeFigureOut">
               <a:rPr lang="en-IL" smtClean="0"/>
-              <a:t>06/02/2023</a:t>
+              <a:t>08/02/2023</a:t>
             </a:fld>
             <a:endParaRPr lang="en-IL"/>
           </a:p>
@@ -913,7 +913,7 @@
           <a:p>
             <a:fld id="{E0C858BD-AA26-3249-9D78-E68179219554}" type="datetimeFigureOut">
               <a:rPr lang="en-IL" smtClean="0"/>
-              <a:t>06/02/2023</a:t>
+              <a:t>08/02/2023</a:t>
             </a:fld>
             <a:endParaRPr lang="en-IL"/>
           </a:p>
@@ -1189,7 +1189,7 @@
           <a:p>
             <a:fld id="{E0C858BD-AA26-3249-9D78-E68179219554}" type="datetimeFigureOut">
               <a:rPr lang="en-IL" smtClean="0"/>
-              <a:t>06/02/2023</a:t>
+              <a:t>08/02/2023</a:t>
             </a:fld>
             <a:endParaRPr lang="en-IL"/>
           </a:p>
@@ -1457,7 +1457,7 @@
           <a:p>
             <a:fld id="{E0C858BD-AA26-3249-9D78-E68179219554}" type="datetimeFigureOut">
               <a:rPr lang="en-IL" smtClean="0"/>
-              <a:t>06/02/2023</a:t>
+              <a:t>08/02/2023</a:t>
             </a:fld>
             <a:endParaRPr lang="en-IL"/>
           </a:p>
@@ -1872,7 +1872,7 @@
           <a:p>
             <a:fld id="{E0C858BD-AA26-3249-9D78-E68179219554}" type="datetimeFigureOut">
               <a:rPr lang="en-IL" smtClean="0"/>
-              <a:t>06/02/2023</a:t>
+              <a:t>08/02/2023</a:t>
             </a:fld>
             <a:endParaRPr lang="en-IL"/>
           </a:p>
@@ -2014,7 +2014,7 @@
           <a:p>
             <a:fld id="{E0C858BD-AA26-3249-9D78-E68179219554}" type="datetimeFigureOut">
               <a:rPr lang="en-IL" smtClean="0"/>
-              <a:t>06/02/2023</a:t>
+              <a:t>08/02/2023</a:t>
             </a:fld>
             <a:endParaRPr lang="en-IL"/>
           </a:p>
@@ -2127,7 +2127,7 @@
           <a:p>
             <a:fld id="{E0C858BD-AA26-3249-9D78-E68179219554}" type="datetimeFigureOut">
               <a:rPr lang="en-IL" smtClean="0"/>
-              <a:t>06/02/2023</a:t>
+              <a:t>08/02/2023</a:t>
             </a:fld>
             <a:endParaRPr lang="en-IL"/>
           </a:p>
@@ -2440,7 +2440,7 @@
           <a:p>
             <a:fld id="{E0C858BD-AA26-3249-9D78-E68179219554}" type="datetimeFigureOut">
               <a:rPr lang="en-IL" smtClean="0"/>
-              <a:t>06/02/2023</a:t>
+              <a:t>08/02/2023</a:t>
             </a:fld>
             <a:endParaRPr lang="en-IL"/>
           </a:p>
@@ -2729,7 +2729,7 @@
           <a:p>
             <a:fld id="{E0C858BD-AA26-3249-9D78-E68179219554}" type="datetimeFigureOut">
               <a:rPr lang="en-IL" smtClean="0"/>
-              <a:t>06/02/2023</a:t>
+              <a:t>08/02/2023</a:t>
             </a:fld>
             <a:endParaRPr lang="en-IL"/>
           </a:p>
@@ -2972,7 +2972,7 @@
           <a:p>
             <a:fld id="{E0C858BD-AA26-3249-9D78-E68179219554}" type="datetimeFigureOut">
               <a:rPr lang="en-IL" smtClean="0"/>
-              <a:t>06/02/2023</a:t>
+              <a:t>08/02/2023</a:t>
             </a:fld>
             <a:endParaRPr lang="en-IL"/>
           </a:p>
@@ -3651,13 +3651,13 @@
   <p:clrMapOvr>
     <a:overrideClrMapping bg1="dk1" tx1="lt1" bg2="dk2" tx2="lt2" accent1="accent1" accent2="accent2" accent3="accent3" accent4="accent4" accent5="accent5" accent6="accent6" hlink="hlink" folHlink="folHlink"/>
   </p:clrMapOvr>
-  <mc:AlternateContent xmlns:mc="http://schemas.openxmlformats.org/markup-compatibility/2006">
-    <mc:Choice xmlns:p159="http://schemas.microsoft.com/office/powerpoint/2015/09/main" Requires="p159">
+  <mc:AlternateContent xmlns:mc="http://schemas.openxmlformats.org/markup-compatibility/2006" xmlns:p159="http://schemas.microsoft.com/office/powerpoint/2015/09/main">
+    <mc:Choice Requires="p159">
       <p:transition xmlns:p14="http://schemas.microsoft.com/office/powerpoint/2010/main" spd="slow" p14:dur="2000">
         <p159:morph option="byObject"/>
       </p:transition>
     </mc:Choice>
-    <mc:Fallback>
+    <mc:Fallback xmlns="">
       <p:transition spd="slow">
         <p:fade/>
       </p:transition>
@@ -3822,13 +3822,13 @@
   <p:clrMapOvr>
     <a:masterClrMapping/>
   </p:clrMapOvr>
-  <mc:AlternateContent xmlns:mc="http://schemas.openxmlformats.org/markup-compatibility/2006">
-    <mc:Choice xmlns:p159="http://schemas.microsoft.com/office/powerpoint/2015/09/main" Requires="p159">
+  <mc:AlternateContent xmlns:mc="http://schemas.openxmlformats.org/markup-compatibility/2006" xmlns:p159="http://schemas.microsoft.com/office/powerpoint/2015/09/main">
+    <mc:Choice Requires="p159">
       <p:transition xmlns:p14="http://schemas.microsoft.com/office/powerpoint/2010/main" spd="slow" p14:dur="2000">
         <p159:morph option="byObject"/>
       </p:transition>
     </mc:Choice>
-    <mc:Fallback>
+    <mc:Fallback xmlns="">
       <p:transition spd="slow">
         <p:fade/>
       </p:transition>
@@ -4013,13 +4013,13 @@
   <p:clrMapOvr>
     <a:masterClrMapping/>
   </p:clrMapOvr>
-  <mc:AlternateContent xmlns:mc="http://schemas.openxmlformats.org/markup-compatibility/2006">
-    <mc:Choice xmlns:p159="http://schemas.microsoft.com/office/powerpoint/2015/09/main" Requires="p159">
+  <mc:AlternateContent xmlns:mc="http://schemas.openxmlformats.org/markup-compatibility/2006" xmlns:p159="http://schemas.microsoft.com/office/powerpoint/2015/09/main">
+    <mc:Choice Requires="p159">
       <p:transition xmlns:p14="http://schemas.microsoft.com/office/powerpoint/2010/main" spd="slow" p14:dur="2000">
         <p159:morph option="byObject"/>
       </p:transition>
     </mc:Choice>
-    <mc:Fallback>
+    <mc:Fallback xmlns="">
       <p:transition spd="slow">
         <p:fade/>
       </p:transition>
@@ -4418,13 +4418,13 @@
   <p:clrMapOvr>
     <a:overrideClrMapping bg1="dk1" tx1="lt1" bg2="dk2" tx2="lt2" accent1="accent1" accent2="accent2" accent3="accent3" accent4="accent4" accent5="accent5" accent6="accent6" hlink="hlink" folHlink="folHlink"/>
   </p:clrMapOvr>
-  <mc:AlternateContent xmlns:mc="http://schemas.openxmlformats.org/markup-compatibility/2006">
-    <mc:Choice xmlns:p159="http://schemas.microsoft.com/office/powerpoint/2015/09/main" Requires="p159">
+  <mc:AlternateContent xmlns:mc="http://schemas.openxmlformats.org/markup-compatibility/2006" xmlns:p159="http://schemas.microsoft.com/office/powerpoint/2015/09/main">
+    <mc:Choice Requires="p159">
       <p:transition xmlns:p14="http://schemas.microsoft.com/office/powerpoint/2010/main" spd="slow" p14:dur="2000">
         <p159:morph option="byObject"/>
       </p:transition>
     </mc:Choice>
-    <mc:Fallback>
+    <mc:Fallback xmlns="">
       <p:transition spd="slow">
         <p:fade/>
       </p:transition>
@@ -4725,13 +4725,13 @@
   <p:clrMapOvr>
     <a:masterClrMapping/>
   </p:clrMapOvr>
-  <mc:AlternateContent xmlns:mc="http://schemas.openxmlformats.org/markup-compatibility/2006">
-    <mc:Choice xmlns:p159="http://schemas.microsoft.com/office/powerpoint/2015/09/main" Requires="p159">
+  <mc:AlternateContent xmlns:mc="http://schemas.openxmlformats.org/markup-compatibility/2006" xmlns:p159="http://schemas.microsoft.com/office/powerpoint/2015/09/main">
+    <mc:Choice Requires="p159">
       <p:transition xmlns:p14="http://schemas.microsoft.com/office/powerpoint/2010/main" spd="slow" p14:dur="2000">
         <p159:morph option="byObject"/>
       </p:transition>
     </mc:Choice>
-    <mc:Fallback>
+    <mc:Fallback xmlns="">
       <p:transition spd="slow">
         <p:fade/>
       </p:transition>
@@ -6809,13 +6809,13 @@
   <p:clrMapOvr>
     <a:masterClrMapping/>
   </p:clrMapOvr>
-  <mc:AlternateContent xmlns:mc="http://schemas.openxmlformats.org/markup-compatibility/2006">
-    <mc:Choice xmlns:p159="http://schemas.microsoft.com/office/powerpoint/2015/09/main" Requires="p159">
+  <mc:AlternateContent xmlns:mc="http://schemas.openxmlformats.org/markup-compatibility/2006" xmlns:p159="http://schemas.microsoft.com/office/powerpoint/2015/09/main">
+    <mc:Choice Requires="p159">
       <p:transition xmlns:p14="http://schemas.microsoft.com/office/powerpoint/2010/main" spd="slow" p14:dur="2000">
         <p159:morph option="byObject"/>
       </p:transition>
     </mc:Choice>
-    <mc:Fallback>
+    <mc:Fallback xmlns="">
       <p:transition spd="slow">
         <p:fade/>
       </p:transition>
@@ -6901,13 +6901,13 @@
   <p:clrMapOvr>
     <a:masterClrMapping/>
   </p:clrMapOvr>
-  <mc:AlternateContent xmlns:mc="http://schemas.openxmlformats.org/markup-compatibility/2006">
-    <mc:Choice xmlns:p159="http://schemas.microsoft.com/office/powerpoint/2015/09/main" Requires="p159">
+  <mc:AlternateContent xmlns:mc="http://schemas.openxmlformats.org/markup-compatibility/2006" xmlns:p159="http://schemas.microsoft.com/office/powerpoint/2015/09/main">
+    <mc:Choice Requires="p159">
       <p:transition xmlns:p14="http://schemas.microsoft.com/office/powerpoint/2010/main" spd="slow" p14:dur="2000">
         <p159:morph option="byObject"/>
       </p:transition>
     </mc:Choice>
-    <mc:Fallback>
+    <mc:Fallback xmlns="">
       <p:transition spd="slow">
         <p:fade/>
       </p:transition>
@@ -7078,13 +7078,13 @@
   <p:clrMapOvr>
     <a:masterClrMapping/>
   </p:clrMapOvr>
-  <mc:AlternateContent xmlns:mc="http://schemas.openxmlformats.org/markup-compatibility/2006">
-    <mc:Choice xmlns:p159="http://schemas.microsoft.com/office/powerpoint/2015/09/main" Requires="p159">
+  <mc:AlternateContent xmlns:mc="http://schemas.openxmlformats.org/markup-compatibility/2006" xmlns:p159="http://schemas.microsoft.com/office/powerpoint/2015/09/main">
+    <mc:Choice Requires="p159">
       <p:transition xmlns:p14="http://schemas.microsoft.com/office/powerpoint/2010/main" spd="slow" p14:dur="2000">
         <p159:morph option="byObject"/>
       </p:transition>
     </mc:Choice>
-    <mc:Fallback>
+    <mc:Fallback xmlns="">
       <p:transition spd="slow">
         <p:fade/>
       </p:transition>
@@ -7235,13 +7235,13 @@
   <p:clrMapOvr>
     <a:masterClrMapping/>
   </p:clrMapOvr>
-  <mc:AlternateContent xmlns:mc="http://schemas.openxmlformats.org/markup-compatibility/2006">
-    <mc:Choice xmlns:p159="http://schemas.microsoft.com/office/powerpoint/2015/09/main" Requires="p159">
+  <mc:AlternateContent xmlns:mc="http://schemas.openxmlformats.org/markup-compatibility/2006" xmlns:p159="http://schemas.microsoft.com/office/powerpoint/2015/09/main">
+    <mc:Choice Requires="p159">
       <p:transition xmlns:p14="http://schemas.microsoft.com/office/powerpoint/2010/main" spd="slow" p14:dur="2000">
         <p159:morph option="byObject"/>
       </p:transition>
     </mc:Choice>
-    <mc:Fallback>
+    <mc:Fallback xmlns="">
       <p:transition spd="slow">
         <p:fade/>
       </p:transition>
@@ -7427,13 +7427,13 @@
   <p:clrMapOvr>
     <a:masterClrMapping/>
   </p:clrMapOvr>
-  <mc:AlternateContent xmlns:mc="http://schemas.openxmlformats.org/markup-compatibility/2006">
-    <mc:Choice xmlns:p159="http://schemas.microsoft.com/office/powerpoint/2015/09/main" Requires="p159">
+  <mc:AlternateContent xmlns:mc="http://schemas.openxmlformats.org/markup-compatibility/2006" xmlns:p159="http://schemas.microsoft.com/office/powerpoint/2015/09/main">
+    <mc:Choice Requires="p159">
       <p:transition xmlns:p14="http://schemas.microsoft.com/office/powerpoint/2010/main" spd="slow" p14:dur="2000">
         <p159:morph option="byObject"/>
       </p:transition>
     </mc:Choice>
-    <mc:Fallback>
+    <mc:Fallback xmlns="">
       <p:transition spd="slow">
         <p:fade/>
       </p:transition>
@@ -7962,13 +7962,13 @@
   <p:clrMapOvr>
     <a:masterClrMapping/>
   </p:clrMapOvr>
-  <mc:AlternateContent xmlns:mc="http://schemas.openxmlformats.org/markup-compatibility/2006">
-    <mc:Choice xmlns:p159="http://schemas.microsoft.com/office/powerpoint/2015/09/main" Requires="p159">
+  <mc:AlternateContent xmlns:mc="http://schemas.openxmlformats.org/markup-compatibility/2006" xmlns:p159="http://schemas.microsoft.com/office/powerpoint/2015/09/main">
+    <mc:Choice Requires="p159">
       <p:transition xmlns:p14="http://schemas.microsoft.com/office/powerpoint/2010/main" spd="slow" p14:dur="2000">
         <p159:morph option="byObject"/>
       </p:transition>
     </mc:Choice>
-    <mc:Fallback>
+    <mc:Fallback xmlns="">
       <p:transition spd="slow">
         <p:fade/>
       </p:transition>
@@ -8303,13 +8303,13 @@
   <p:clrMapOvr>
     <a:overrideClrMapping bg1="dk1" tx1="lt1" bg2="dk2" tx2="lt2" accent1="accent1" accent2="accent2" accent3="accent3" accent4="accent4" accent5="accent5" accent6="accent6" hlink="hlink" folHlink="folHlink"/>
   </p:clrMapOvr>
-  <mc:AlternateContent xmlns:mc="http://schemas.openxmlformats.org/markup-compatibility/2006">
-    <mc:Choice xmlns:p159="http://schemas.microsoft.com/office/powerpoint/2015/09/main" Requires="p159">
+  <mc:AlternateContent xmlns:mc="http://schemas.openxmlformats.org/markup-compatibility/2006" xmlns:p159="http://schemas.microsoft.com/office/powerpoint/2015/09/main">
+    <mc:Choice Requires="p159">
       <p:transition xmlns:p14="http://schemas.microsoft.com/office/powerpoint/2010/main" spd="slow" p14:dur="2000">
         <p159:morph option="byObject"/>
       </p:transition>
     </mc:Choice>
-    <mc:Fallback>
+    <mc:Fallback xmlns="">
       <p:transition spd="slow">
         <p:fade/>
       </p:transition>
@@ -8806,13 +8806,13 @@
   <p:clrMapOvr>
     <a:masterClrMapping/>
   </p:clrMapOvr>
-  <mc:AlternateContent xmlns:mc="http://schemas.openxmlformats.org/markup-compatibility/2006">
-    <mc:Choice xmlns:p159="http://schemas.microsoft.com/office/powerpoint/2015/09/main" Requires="p159">
+  <mc:AlternateContent xmlns:mc="http://schemas.openxmlformats.org/markup-compatibility/2006" xmlns:p159="http://schemas.microsoft.com/office/powerpoint/2015/09/main">
+    <mc:Choice Requires="p159">
       <p:transition xmlns:p14="http://schemas.microsoft.com/office/powerpoint/2010/main" spd="slow" p14:dur="2000">
         <p159:morph option="byObject"/>
       </p:transition>
     </mc:Choice>
-    <mc:Fallback>
+    <mc:Fallback xmlns="">
       <p:transition spd="slow">
         <p:fade/>
       </p:transition>
@@ -8898,13 +8898,13 @@
   <p:clrMapOvr>
     <a:masterClrMapping/>
   </p:clrMapOvr>
-  <mc:AlternateContent xmlns:mc="http://schemas.openxmlformats.org/markup-compatibility/2006">
-    <mc:Choice xmlns:p159="http://schemas.microsoft.com/office/powerpoint/2015/09/main" Requires="p159">
+  <mc:AlternateContent xmlns:mc="http://schemas.openxmlformats.org/markup-compatibility/2006" xmlns:p159="http://schemas.microsoft.com/office/powerpoint/2015/09/main">
+    <mc:Choice Requires="p159">
       <p:transition xmlns:p14="http://schemas.microsoft.com/office/powerpoint/2010/main" spd="slow" p14:dur="2000">
         <p159:morph option="byObject"/>
       </p:transition>
     </mc:Choice>
-    <mc:Fallback>
+    <mc:Fallback xmlns="">
       <p:transition spd="slow">
         <p:fade/>
       </p:transition>
@@ -12318,13 +12318,13 @@
   <p:clrMapOvr>
     <a:masterClrMapping/>
   </p:clrMapOvr>
-  <mc:AlternateContent xmlns:mc="http://schemas.openxmlformats.org/markup-compatibility/2006">
-    <mc:Choice xmlns:p159="http://schemas.microsoft.com/office/powerpoint/2015/09/main" Requires="p159">
+  <mc:AlternateContent xmlns:mc="http://schemas.openxmlformats.org/markup-compatibility/2006" xmlns:p159="http://schemas.microsoft.com/office/powerpoint/2015/09/main">
+    <mc:Choice Requires="p159">
       <p:transition xmlns:p14="http://schemas.microsoft.com/office/powerpoint/2010/main" spd="slow" p14:dur="2000">
         <p159:morph option="byObject"/>
       </p:transition>
     </mc:Choice>
-    <mc:Fallback>
+    <mc:Fallback xmlns="">
       <p:transition spd="slow">
         <p:fade/>
       </p:transition>
@@ -13517,13 +13517,13 @@
   <p:clrMapOvr>
     <a:masterClrMapping/>
   </p:clrMapOvr>
-  <mc:AlternateContent xmlns:mc="http://schemas.openxmlformats.org/markup-compatibility/2006">
-    <mc:Choice xmlns:p159="http://schemas.microsoft.com/office/powerpoint/2015/09/main" Requires="p159">
+  <mc:AlternateContent xmlns:mc="http://schemas.openxmlformats.org/markup-compatibility/2006" xmlns:p159="http://schemas.microsoft.com/office/powerpoint/2015/09/main">
+    <mc:Choice Requires="p159">
       <p:transition xmlns:p14="http://schemas.microsoft.com/office/powerpoint/2010/main" spd="slow" p14:dur="2000">
         <p159:morph option="byObject"/>
       </p:transition>
     </mc:Choice>
-    <mc:Fallback>
+    <mc:Fallback xmlns="">
       <p:transition spd="slow">
         <p:fade/>
       </p:transition>
@@ -13723,13 +13723,13 @@
   <p:clrMapOvr>
     <a:masterClrMapping/>
   </p:clrMapOvr>
-  <mc:AlternateContent xmlns:mc="http://schemas.openxmlformats.org/markup-compatibility/2006">
-    <mc:Choice xmlns:p159="http://schemas.microsoft.com/office/powerpoint/2015/09/main" Requires="p159">
+  <mc:AlternateContent xmlns:mc="http://schemas.openxmlformats.org/markup-compatibility/2006" xmlns:p159="http://schemas.microsoft.com/office/powerpoint/2015/09/main">
+    <mc:Choice Requires="p159">
       <p:transition xmlns:p14="http://schemas.microsoft.com/office/powerpoint/2010/main" spd="slow" p14:dur="2000">
         <p159:morph option="byObject"/>
       </p:transition>
     </mc:Choice>
-    <mc:Fallback>
+    <mc:Fallback xmlns="">
       <p:transition spd="slow">
         <p:fade/>
       </p:transition>
@@ -13925,49 +13925,49 @@
           <a:lstStyle/>
           <a:p>
             <a:r>
-              <a:rPr lang="en-US" sz="1100">
+              <a:rPr lang="en-US" sz="1100" dirty="0">
                 <a:latin typeface="Söhne"/>
               </a:rPr>
               <a:t>Hyphens are characters that are used to connect words to form a compound word, and to split words at the end of a line in justified text. They are represented by the symbol "-" and can be used for several purposes in written language.</a:t>
             </a:r>
           </a:p>
           <a:p>
-            <a:endParaRPr lang="en-US" sz="1100">
+            <a:endParaRPr lang="en-US" sz="1100" dirty="0">
               <a:latin typeface="Söhne"/>
             </a:endParaRPr>
           </a:p>
           <a:p>
             <a:r>
-              <a:rPr lang="en-US" sz="1100"/>
+              <a:rPr lang="en-US" sz="1100" dirty="0"/>
               <a:t>To join two words together to form a compound word, e.g. "mother-in-law".</a:t>
             </a:r>
           </a:p>
           <a:p>
             <a:r>
-              <a:rPr lang="en-US" sz="1100"/>
+              <a:rPr lang="en-US" sz="1100" dirty="0"/>
               <a:t>To split a word at the end of a line to avoid breaking the word between syllables. This is called hyphenation.</a:t>
             </a:r>
           </a:p>
           <a:p>
             <a:r>
-              <a:rPr lang="en-US" sz="1100"/>
+              <a:rPr lang="en-US" sz="1100" dirty="0"/>
               <a:t>To specify negative numbers, e.g. "-5".</a:t>
             </a:r>
           </a:p>
           <a:p>
             <a:r>
-              <a:rPr lang="en-US" sz="1100"/>
+              <a:rPr lang="en-US" sz="1100" dirty="0"/>
               <a:t>To form a range of values, e.g. "pages 25-30".</a:t>
             </a:r>
           </a:p>
           <a:p>
             <a:r>
-              <a:rPr lang="en-US" sz="1100"/>
+              <a:rPr lang="en-US" sz="1100" dirty="0"/>
               <a:t>In CSS, hyphens are also used to specify hyphenation for long words in justified text. This is done using the hyphens property, which can have the values none, manual, auto, or inherit. The auto value allows the browser to automatically determine when to hyphenate words, while the manual value allows the developer to specify hyphenation points.</a:t>
             </a:r>
           </a:p>
           <a:p>
-            <a:endParaRPr lang="en-IL" sz="1100"/>
+            <a:endParaRPr lang="en-IL" sz="1100" dirty="0"/>
           </a:p>
         </p:txBody>
       </p:sp>
@@ -13981,13 +13981,13 @@
   <p:clrMapOvr>
     <a:masterClrMapping/>
   </p:clrMapOvr>
-  <mc:AlternateContent xmlns:mc="http://schemas.openxmlformats.org/markup-compatibility/2006">
-    <mc:Choice xmlns:p159="http://schemas.microsoft.com/office/powerpoint/2015/09/main" Requires="p159">
+  <mc:AlternateContent xmlns:mc="http://schemas.openxmlformats.org/markup-compatibility/2006" xmlns:p159="http://schemas.microsoft.com/office/powerpoint/2015/09/main">
+    <mc:Choice Requires="p159">
       <p:transition xmlns:p14="http://schemas.microsoft.com/office/powerpoint/2010/main" spd="slow" p14:dur="2000">
         <p159:morph option="byObject"/>
       </p:transition>
     </mc:Choice>
-    <mc:Fallback>
+    <mc:Fallback xmlns="">
       <p:transition spd="slow">
         <p:fade/>
       </p:transition>
@@ -15390,13 +15390,13 @@
   <p:clrMapOvr>
     <a:masterClrMapping/>
   </p:clrMapOvr>
-  <mc:AlternateContent xmlns:mc="http://schemas.openxmlformats.org/markup-compatibility/2006">
-    <mc:Choice xmlns:p159="http://schemas.microsoft.com/office/powerpoint/2015/09/main" Requires="p159">
+  <mc:AlternateContent xmlns:mc="http://schemas.openxmlformats.org/markup-compatibility/2006" xmlns:p159="http://schemas.microsoft.com/office/powerpoint/2015/09/main">
+    <mc:Choice Requires="p159">
       <p:transition xmlns:p14="http://schemas.microsoft.com/office/powerpoint/2010/main" spd="slow" p14:dur="2000">
         <p159:morph option="byObject"/>
       </p:transition>
     </mc:Choice>
-    <mc:Fallback>
+    <mc:Fallback xmlns="">
       <p:transition spd="slow">
         <p:fade/>
       </p:transition>
@@ -15512,14 +15512,18 @@
             <a:r>
               <a:rPr lang="en-US" b="1" i="0" dirty="0">
                 <a:solidFill>
-                  <a:srgbClr val="FFFFFF"/>
+                  <a:srgbClr val="FF0000"/>
                 </a:solidFill>
                 <a:effectLst/>
                 <a:latin typeface="Söhne Mono"/>
               </a:rPr>
               <a:t>visibility</a:t>
             </a:r>
-            <a:endParaRPr lang="en-IL" dirty="0"/>
+            <a:endParaRPr lang="en-IL" dirty="0">
+              <a:solidFill>
+                <a:srgbClr val="FF0000"/>
+              </a:solidFill>
+            </a:endParaRPr>
           </a:p>
         </p:txBody>
       </p:sp>
@@ -15533,13 +15537,13 @@
   <p:clrMapOvr>
     <a:masterClrMapping/>
   </p:clrMapOvr>
-  <mc:AlternateContent xmlns:mc="http://schemas.openxmlformats.org/markup-compatibility/2006">
-    <mc:Choice xmlns:p159="http://schemas.microsoft.com/office/powerpoint/2015/09/main" Requires="p159">
+  <mc:AlternateContent xmlns:mc="http://schemas.openxmlformats.org/markup-compatibility/2006" xmlns:p159="http://schemas.microsoft.com/office/powerpoint/2015/09/main">
+    <mc:Choice Requires="p159">
       <p:transition xmlns:p14="http://schemas.microsoft.com/office/powerpoint/2010/main" spd="slow" p14:dur="2000">
         <p159:morph option="byObject"/>
       </p:transition>
     </mc:Choice>
-    <mc:Fallback>
+    <mc:Fallback xmlns="">
       <p:transition spd="slow">
         <p:fade/>
       </p:transition>
@@ -17877,13 +17881,13 @@
   <p:clrMapOvr>
     <a:masterClrMapping/>
   </p:clrMapOvr>
-  <mc:AlternateContent xmlns:mc="http://schemas.openxmlformats.org/markup-compatibility/2006">
-    <mc:Choice xmlns:p159="http://schemas.microsoft.com/office/powerpoint/2015/09/main" Requires="p159">
+  <mc:AlternateContent xmlns:mc="http://schemas.openxmlformats.org/markup-compatibility/2006" xmlns:p159="http://schemas.microsoft.com/office/powerpoint/2015/09/main">
+    <mc:Choice Requires="p159">
       <p:transition xmlns:p14="http://schemas.microsoft.com/office/powerpoint/2010/main" spd="slow" p14:dur="2000">
         <p159:morph option="byObject"/>
       </p:transition>
     </mc:Choice>
-    <mc:Fallback>
+    <mc:Fallback xmlns="">
       <p:transition spd="slow">
         <p:fade/>
       </p:transition>
@@ -18429,13 +18433,13 @@
   <p:clrMapOvr>
     <a:masterClrMapping/>
   </p:clrMapOvr>
-  <mc:AlternateContent xmlns:mc="http://schemas.openxmlformats.org/markup-compatibility/2006">
-    <mc:Choice xmlns:p159="http://schemas.microsoft.com/office/powerpoint/2015/09/main" Requires="p159">
+  <mc:AlternateContent xmlns:mc="http://schemas.openxmlformats.org/markup-compatibility/2006" xmlns:p159="http://schemas.microsoft.com/office/powerpoint/2015/09/main">
+    <mc:Choice Requires="p159">
       <p:transition xmlns:p14="http://schemas.microsoft.com/office/powerpoint/2010/main" spd="slow" p14:dur="2000">
         <p159:morph option="byObject"/>
       </p:transition>
     </mc:Choice>
-    <mc:Fallback>
+    <mc:Fallback xmlns="">
       <p:transition spd="slow">
         <p:fade/>
       </p:transition>
@@ -19310,13 +19314,13 @@
   <p:clrMapOvr>
     <a:masterClrMapping/>
   </p:clrMapOvr>
-  <mc:AlternateContent xmlns:mc="http://schemas.openxmlformats.org/markup-compatibility/2006">
-    <mc:Choice xmlns:p159="http://schemas.microsoft.com/office/powerpoint/2015/09/main" Requires="p159">
+  <mc:AlternateContent xmlns:mc="http://schemas.openxmlformats.org/markup-compatibility/2006" xmlns:p159="http://schemas.microsoft.com/office/powerpoint/2015/09/main">
+    <mc:Choice Requires="p159">
       <p:transition xmlns:p14="http://schemas.microsoft.com/office/powerpoint/2010/main" spd="slow" p14:dur="2000">
         <p159:morph option="byObject"/>
       </p:transition>
     </mc:Choice>
-    <mc:Fallback>
+    <mc:Fallback xmlns="">
       <p:transition spd="slow">
         <p:fade/>
       </p:transition>
@@ -20648,13 +20652,13 @@
   <p:clrMapOvr>
     <a:masterClrMapping/>
   </p:clrMapOvr>
-  <mc:AlternateContent xmlns:mc="http://schemas.openxmlformats.org/markup-compatibility/2006">
-    <mc:Choice xmlns:p159="http://schemas.microsoft.com/office/powerpoint/2015/09/main" Requires="p159">
+  <mc:AlternateContent xmlns:mc="http://schemas.openxmlformats.org/markup-compatibility/2006" xmlns:p159="http://schemas.microsoft.com/office/powerpoint/2015/09/main">
+    <mc:Choice Requires="p159">
       <p:transition xmlns:p14="http://schemas.microsoft.com/office/powerpoint/2010/main" spd="slow" p14:dur="2000">
         <p159:morph option="byObject"/>
       </p:transition>
     </mc:Choice>
-    <mc:Fallback>
+    <mc:Fallback xmlns="">
       <p:transition spd="slow">
         <p:fade/>
       </p:transition>
@@ -20939,13 +20943,13 @@
   <p:clrMapOvr>
     <a:masterClrMapping/>
   </p:clrMapOvr>
-  <mc:AlternateContent xmlns:mc="http://schemas.openxmlformats.org/markup-compatibility/2006">
-    <mc:Choice xmlns:p159="http://schemas.microsoft.com/office/powerpoint/2015/09/main" Requires="p159">
+  <mc:AlternateContent xmlns:mc="http://schemas.openxmlformats.org/markup-compatibility/2006" xmlns:p159="http://schemas.microsoft.com/office/powerpoint/2015/09/main">
+    <mc:Choice Requires="p159">
       <p:transition xmlns:p14="http://schemas.microsoft.com/office/powerpoint/2010/main" spd="slow" p14:dur="2000">
         <p159:morph option="byObject"/>
       </p:transition>
     </mc:Choice>
-    <mc:Fallback>
+    <mc:Fallback xmlns="">
       <p:transition spd="slow">
         <p:fade/>
       </p:transition>
@@ -21084,13 +21088,13 @@
   <p:clrMapOvr>
     <a:masterClrMapping/>
   </p:clrMapOvr>
-  <mc:AlternateContent xmlns:mc="http://schemas.openxmlformats.org/markup-compatibility/2006">
-    <mc:Choice xmlns:p159="http://schemas.microsoft.com/office/powerpoint/2015/09/main" Requires="p159">
+  <mc:AlternateContent xmlns:mc="http://schemas.openxmlformats.org/markup-compatibility/2006" xmlns:p159="http://schemas.microsoft.com/office/powerpoint/2015/09/main">
+    <mc:Choice Requires="p159">
       <p:transition xmlns:p14="http://schemas.microsoft.com/office/powerpoint/2010/main" spd="slow" p14:dur="2000">
         <p159:morph option="byObject"/>
       </p:transition>
     </mc:Choice>
-    <mc:Fallback>
+    <mc:Fallback xmlns="">
       <p:transition spd="slow">
         <p:fade/>
       </p:transition>
@@ -21203,13 +21207,13 @@
   <p:clrMapOvr>
     <a:masterClrMapping/>
   </p:clrMapOvr>
-  <mc:AlternateContent xmlns:mc="http://schemas.openxmlformats.org/markup-compatibility/2006">
-    <mc:Choice xmlns:p159="http://schemas.microsoft.com/office/powerpoint/2015/09/main" Requires="p159">
+  <mc:AlternateContent xmlns:mc="http://schemas.openxmlformats.org/markup-compatibility/2006" xmlns:p159="http://schemas.microsoft.com/office/powerpoint/2015/09/main">
+    <mc:Choice Requires="p159">
       <p:transition xmlns:p14="http://schemas.microsoft.com/office/powerpoint/2010/main" spd="slow" p14:dur="2000">
         <p159:morph option="byObject"/>
       </p:transition>
     </mc:Choice>
-    <mc:Fallback>
+    <mc:Fallback xmlns="">
       <p:transition spd="slow">
         <p:fade/>
       </p:transition>
@@ -21350,13 +21354,13 @@
   <p:clrMapOvr>
     <a:masterClrMapping/>
   </p:clrMapOvr>
-  <mc:AlternateContent xmlns:mc="http://schemas.openxmlformats.org/markup-compatibility/2006">
-    <mc:Choice xmlns:p159="http://schemas.microsoft.com/office/powerpoint/2015/09/main" Requires="p159">
+  <mc:AlternateContent xmlns:mc="http://schemas.openxmlformats.org/markup-compatibility/2006" xmlns:p159="http://schemas.microsoft.com/office/powerpoint/2015/09/main">
+    <mc:Choice Requires="p159">
       <p:transition xmlns:p14="http://schemas.microsoft.com/office/powerpoint/2010/main" spd="slow" p14:dur="2000">
         <p159:morph option="byObject"/>
       </p:transition>
     </mc:Choice>
-    <mc:Fallback>
+    <mc:Fallback xmlns="">
       <p:transition spd="slow">
         <p:fade/>
       </p:transition>
@@ -21495,13 +21499,13 @@
   <p:clrMapOvr>
     <a:masterClrMapping/>
   </p:clrMapOvr>
-  <mc:AlternateContent xmlns:mc="http://schemas.openxmlformats.org/markup-compatibility/2006">
-    <mc:Choice xmlns:p159="http://schemas.microsoft.com/office/powerpoint/2015/09/main" Requires="p159">
+  <mc:AlternateContent xmlns:mc="http://schemas.openxmlformats.org/markup-compatibility/2006" xmlns:p159="http://schemas.microsoft.com/office/powerpoint/2015/09/main">
+    <mc:Choice Requires="p159">
       <p:transition xmlns:p14="http://schemas.microsoft.com/office/powerpoint/2010/main" spd="slow" p14:dur="2000">
         <p159:morph option="byObject"/>
       </p:transition>
     </mc:Choice>
-    <mc:Fallback>
+    <mc:Fallback xmlns="">
       <p:transition spd="slow">
         <p:fade/>
       </p:transition>
@@ -21687,13 +21691,13 @@
   <p:clrMapOvr>
     <a:masterClrMapping/>
   </p:clrMapOvr>
-  <mc:AlternateContent xmlns:mc="http://schemas.openxmlformats.org/markup-compatibility/2006">
-    <mc:Choice xmlns:p159="http://schemas.microsoft.com/office/powerpoint/2015/09/main" Requires="p159">
+  <mc:AlternateContent xmlns:mc="http://schemas.openxmlformats.org/markup-compatibility/2006" xmlns:p159="http://schemas.microsoft.com/office/powerpoint/2015/09/main">
+    <mc:Choice Requires="p159">
       <p:transition xmlns:p14="http://schemas.microsoft.com/office/powerpoint/2010/main" spd="slow" p14:dur="2000">
         <p159:morph option="byObject"/>
       </p:transition>
     </mc:Choice>
-    <mc:Fallback>
+    <mc:Fallback xmlns="">
       <p:transition spd="slow">
         <p:fade/>
       </p:transition>
@@ -21779,13 +21783,13 @@
   <p:clrMapOvr>
     <a:masterClrMapping/>
   </p:clrMapOvr>
-  <mc:AlternateContent xmlns:mc="http://schemas.openxmlformats.org/markup-compatibility/2006">
-    <mc:Choice xmlns:p159="http://schemas.microsoft.com/office/powerpoint/2015/09/main" Requires="p159">
+  <mc:AlternateContent xmlns:mc="http://schemas.openxmlformats.org/markup-compatibility/2006" xmlns:p159="http://schemas.microsoft.com/office/powerpoint/2015/09/main">
+    <mc:Choice Requires="p159">
       <p:transition xmlns:p14="http://schemas.microsoft.com/office/powerpoint/2010/main" spd="slow" p14:dur="2000">
         <p159:morph option="byObject"/>
       </p:transition>
     </mc:Choice>
-    <mc:Fallback>
+    <mc:Fallback xmlns="">
       <p:transition spd="slow">
         <p:fade/>
       </p:transition>
@@ -22002,13 +22006,13 @@
   <p:clrMapOvr>
     <a:masterClrMapping/>
   </p:clrMapOvr>
-  <mc:AlternateContent xmlns:mc="http://schemas.openxmlformats.org/markup-compatibility/2006">
-    <mc:Choice xmlns:p159="http://schemas.microsoft.com/office/powerpoint/2015/09/main" Requires="p159">
+  <mc:AlternateContent xmlns:mc="http://schemas.openxmlformats.org/markup-compatibility/2006" xmlns:p159="http://schemas.microsoft.com/office/powerpoint/2015/09/main">
+    <mc:Choice Requires="p159">
       <p:transition xmlns:p14="http://schemas.microsoft.com/office/powerpoint/2010/main" spd="slow" p14:dur="2000">
         <p159:morph option="byObject"/>
       </p:transition>
     </mc:Choice>
-    <mc:Fallback>
+    <mc:Fallback xmlns="">
       <p:transition spd="slow">
         <p:fade/>
       </p:transition>
@@ -22264,13 +22268,13 @@
   <p:clrMapOvr>
     <a:masterClrMapping/>
   </p:clrMapOvr>
-  <mc:AlternateContent xmlns:mc="http://schemas.openxmlformats.org/markup-compatibility/2006">
-    <mc:Choice xmlns:p159="http://schemas.microsoft.com/office/powerpoint/2015/09/main" Requires="p159">
+  <mc:AlternateContent xmlns:mc="http://schemas.openxmlformats.org/markup-compatibility/2006" xmlns:p159="http://schemas.microsoft.com/office/powerpoint/2015/09/main">
+    <mc:Choice Requires="p159">
       <p:transition xmlns:p14="http://schemas.microsoft.com/office/powerpoint/2010/main" spd="slow" p14:dur="2000">
         <p159:morph option="byObject"/>
       </p:transition>
     </mc:Choice>
-    <mc:Fallback>
+    <mc:Fallback xmlns="">
       <p:transition spd="slow">
         <p:fade/>
       </p:transition>
@@ -22419,13 +22423,13 @@
   <p:clrMapOvr>
     <a:masterClrMapping/>
   </p:clrMapOvr>
-  <mc:AlternateContent xmlns:mc="http://schemas.openxmlformats.org/markup-compatibility/2006">
-    <mc:Choice xmlns:p159="http://schemas.microsoft.com/office/powerpoint/2015/09/main" Requires="p159">
+  <mc:AlternateContent xmlns:mc="http://schemas.openxmlformats.org/markup-compatibility/2006" xmlns:p159="http://schemas.microsoft.com/office/powerpoint/2015/09/main">
+    <mc:Choice Requires="p159">
       <p:transition xmlns:p14="http://schemas.microsoft.com/office/powerpoint/2010/main" spd="slow" p14:dur="2000">
         <p159:morph option="byObject"/>
       </p:transition>
     </mc:Choice>
-    <mc:Fallback>
+    <mc:Fallback xmlns="">
       <p:transition spd="slow">
         <p:fade/>
       </p:transition>
@@ -22956,13 +22960,13 @@
   <p:clrMapOvr>
     <a:masterClrMapping/>
   </p:clrMapOvr>
-  <mc:AlternateContent xmlns:mc="http://schemas.openxmlformats.org/markup-compatibility/2006">
-    <mc:Choice xmlns:p159="http://schemas.microsoft.com/office/powerpoint/2015/09/main" Requires="p159">
+  <mc:AlternateContent xmlns:mc="http://schemas.openxmlformats.org/markup-compatibility/2006" xmlns:p159="http://schemas.microsoft.com/office/powerpoint/2015/09/main">
+    <mc:Choice Requires="p159">
       <p:transition xmlns:p14="http://schemas.microsoft.com/office/powerpoint/2010/main" spd="slow" p14:dur="2000">
         <p159:morph option="byObject"/>
       </p:transition>
     </mc:Choice>
-    <mc:Fallback>
+    <mc:Fallback xmlns="">
       <p:transition spd="slow">
         <p:fade/>
       </p:transition>
@@ -23174,13 +23178,13 @@
   <p:clrMapOvr>
     <a:masterClrMapping/>
   </p:clrMapOvr>
-  <mc:AlternateContent xmlns:mc="http://schemas.openxmlformats.org/markup-compatibility/2006">
-    <mc:Choice xmlns:p159="http://schemas.microsoft.com/office/powerpoint/2015/09/main" Requires="p159">
+  <mc:AlternateContent xmlns:mc="http://schemas.openxmlformats.org/markup-compatibility/2006" xmlns:p159="http://schemas.microsoft.com/office/powerpoint/2015/09/main">
+    <mc:Choice Requires="p159">
       <p:transition xmlns:p14="http://schemas.microsoft.com/office/powerpoint/2010/main" spd="slow" p14:dur="2000">
         <p159:morph option="byObject"/>
       </p:transition>
     </mc:Choice>
-    <mc:Fallback>
+    <mc:Fallback xmlns="">
       <p:transition spd="slow">
         <p:fade/>
       </p:transition>
@@ -23289,13 +23293,13 @@
   <p:clrMapOvr>
     <a:masterClrMapping/>
   </p:clrMapOvr>
-  <mc:AlternateContent xmlns:mc="http://schemas.openxmlformats.org/markup-compatibility/2006">
-    <mc:Choice xmlns:p159="http://schemas.microsoft.com/office/powerpoint/2015/09/main" Requires="p159">
+  <mc:AlternateContent xmlns:mc="http://schemas.openxmlformats.org/markup-compatibility/2006" xmlns:p159="http://schemas.microsoft.com/office/powerpoint/2015/09/main">
+    <mc:Choice Requires="p159">
       <p:transition xmlns:p14="http://schemas.microsoft.com/office/powerpoint/2010/main" spd="slow" p14:dur="2000">
         <p159:morph option="byObject"/>
       </p:transition>
     </mc:Choice>
-    <mc:Fallback>
+    <mc:Fallback xmlns="">
       <p:transition spd="slow">
         <p:fade/>
       </p:transition>
